--- a/Employee_Salary_Analysis_Presentation.pptx
+++ b/Employee_Salary_Analysis_Presentation.pptx
@@ -110,6 +110,11 @@
       </a:defRPr>
     </a:lvl9pPr>
   </p:defaultTextStyle>
+  <p:extLst>
+    <p:ext uri="{EFAFB233-063F-42B5-8137-9DF3F51BA10A}">
+      <p15:sldGuideLst xmlns:p15="http://schemas.microsoft.com/office/powerpoint/2012/main"/>
+    </p:ext>
+  </p:extLst>
 </p:presentation>
 </file>
 
@@ -118,7 +123,7 @@
   <pc:docChgLst>
     <pc:chgData name="Agnelo Lobo" userId="aa5a333d4923ff27" providerId="LiveId" clId="{0ABBD09F-FB54-45DB-9DCF-26A8D8445870}"/>
     <pc:docChg chg="addSld delSld modSld">
-      <pc:chgData name="Agnelo Lobo" userId="aa5a333d4923ff27" providerId="LiveId" clId="{0ABBD09F-FB54-45DB-9DCF-26A8D8445870}" dt="2026-06-18T16:43:24.066" v="214" actId="207"/>
+      <pc:chgData name="Agnelo Lobo" userId="aa5a333d4923ff27" providerId="LiveId" clId="{0ABBD09F-FB54-45DB-9DCF-26A8D8445870}" dt="2026-06-22T19:35:43.281" v="337" actId="20577"/>
       <pc:docMkLst>
         <pc:docMk/>
       </pc:docMkLst>
@@ -145,15 +150,8 @@
           </ac:spMkLst>
         </pc:spChg>
       </pc:sldChg>
-      <pc:sldChg chg="new del">
-        <pc:chgData name="Agnelo Lobo" userId="aa5a333d4923ff27" providerId="LiveId" clId="{0ABBD09F-FB54-45DB-9DCF-26A8D8445870}" dt="2026-06-18T16:19:36.236" v="120" actId="47"/>
-        <pc:sldMkLst>
-          <pc:docMk/>
-          <pc:sldMk cId="3238938149" sldId="257"/>
-        </pc:sldMkLst>
-      </pc:sldChg>
       <pc:sldChg chg="addSp delSp modSp new mod">
-        <pc:chgData name="Agnelo Lobo" userId="aa5a333d4923ff27" providerId="LiveId" clId="{0ABBD09F-FB54-45DB-9DCF-26A8D8445870}" dt="2026-06-18T16:38:12.481" v="191" actId="255"/>
+        <pc:chgData name="Agnelo Lobo" userId="aa5a333d4923ff27" providerId="LiveId" clId="{0ABBD09F-FB54-45DB-9DCF-26A8D8445870}" dt="2026-06-22T19:29:25.591" v="216" actId="113"/>
         <pc:sldMkLst>
           <pc:docMk/>
           <pc:sldMk cId="2659291324" sldId="258"/>
@@ -166,16 +164,8 @@
             <ac:spMk id="2" creationId="{7712FEA0-38C4-793E-6CF2-B7EC64F48C2B}"/>
           </ac:spMkLst>
         </pc:spChg>
-        <pc:spChg chg="del">
-          <ac:chgData name="Agnelo Lobo" userId="aa5a333d4923ff27" providerId="LiveId" clId="{0ABBD09F-FB54-45DB-9DCF-26A8D8445870}" dt="2026-06-18T16:32:25.267" v="184"/>
-          <ac:spMkLst>
-            <pc:docMk/>
-            <pc:sldMk cId="2659291324" sldId="258"/>
-            <ac:spMk id="3" creationId="{D13D5CE3-4CFC-F736-9C33-0A15853A41E9}"/>
-          </ac:spMkLst>
-        </pc:spChg>
         <pc:graphicFrameChg chg="add mod">
-          <ac:chgData name="Agnelo Lobo" userId="aa5a333d4923ff27" providerId="LiveId" clId="{0ABBD09F-FB54-45DB-9DCF-26A8D8445870}" dt="2026-06-18T16:38:12.481" v="191" actId="255"/>
+          <ac:chgData name="Agnelo Lobo" userId="aa5a333d4923ff27" providerId="LiveId" clId="{0ABBD09F-FB54-45DB-9DCF-26A8D8445870}" dt="2026-06-22T19:29:25.591" v="216" actId="113"/>
           <ac:graphicFrameMkLst>
             <pc:docMk/>
             <pc:sldMk cId="2659291324" sldId="258"/>
@@ -184,7 +174,7 @@
         </pc:graphicFrameChg>
       </pc:sldChg>
       <pc:sldChg chg="modSp new mod">
-        <pc:chgData name="Agnelo Lobo" userId="aa5a333d4923ff27" providerId="LiveId" clId="{0ABBD09F-FB54-45DB-9DCF-26A8D8445870}" dt="2026-06-18T16:28:24.690" v="151" actId="207"/>
+        <pc:chgData name="Agnelo Lobo" userId="aa5a333d4923ff27" providerId="LiveId" clId="{0ABBD09F-FB54-45DB-9DCF-26A8D8445870}" dt="2026-06-22T19:26:17.248" v="215" actId="2710"/>
         <pc:sldMkLst>
           <pc:docMk/>
           <pc:sldMk cId="2486813711" sldId="259"/>
@@ -198,7 +188,7 @@
           </ac:spMkLst>
         </pc:spChg>
         <pc:spChg chg="mod">
-          <ac:chgData name="Agnelo Lobo" userId="aa5a333d4923ff27" providerId="LiveId" clId="{0ABBD09F-FB54-45DB-9DCF-26A8D8445870}" dt="2026-06-18T16:28:24.690" v="151" actId="207"/>
+          <ac:chgData name="Agnelo Lobo" userId="aa5a333d4923ff27" providerId="LiveId" clId="{0ABBD09F-FB54-45DB-9DCF-26A8D8445870}" dt="2026-06-22T19:26:17.248" v="215" actId="2710"/>
           <ac:spMkLst>
             <pc:docMk/>
             <pc:sldMk cId="2486813711" sldId="259"/>
@@ -207,7 +197,7 @@
         </pc:spChg>
       </pc:sldChg>
       <pc:sldChg chg="modSp new mod">
-        <pc:chgData name="Agnelo Lobo" userId="aa5a333d4923ff27" providerId="LiveId" clId="{0ABBD09F-FB54-45DB-9DCF-26A8D8445870}" dt="2026-06-18T16:43:24.066" v="214" actId="207"/>
+        <pc:chgData name="Agnelo Lobo" userId="aa5a333d4923ff27" providerId="LiveId" clId="{0ABBD09F-FB54-45DB-9DCF-26A8D8445870}" dt="2026-06-22T19:35:43.281" v="337" actId="20577"/>
         <pc:sldMkLst>
           <pc:docMk/>
           <pc:sldMk cId="2441812231" sldId="260"/>
@@ -221,7 +211,7 @@
           </ac:spMkLst>
         </pc:spChg>
         <pc:spChg chg="mod">
-          <ac:chgData name="Agnelo Lobo" userId="aa5a333d4923ff27" providerId="LiveId" clId="{0ABBD09F-FB54-45DB-9DCF-26A8D8445870}" dt="2026-06-18T16:43:24.066" v="214" actId="207"/>
+          <ac:chgData name="Agnelo Lobo" userId="aa5a333d4923ff27" providerId="LiveId" clId="{0ABBD09F-FB54-45DB-9DCF-26A8D8445870}" dt="2026-06-22T19:35:43.281" v="337" actId="20577"/>
           <ac:spMkLst>
             <pc:docMk/>
             <pc:sldMk cId="2441812231" sldId="260"/>
@@ -376,7 +366,7 @@
               <a:lstStyle/>
               <a:p>
                 <a:pPr>
-                  <a:defRPr sz="1600" b="0" i="0" u="none" strike="noStrike" kern="1200" baseline="0">
+                  <a:defRPr sz="1600" b="1" i="0" u="none" strike="noStrike" kern="1200" baseline="0">
                     <a:solidFill>
                       <a:schemeClr val="tx1">
                         <a:lumMod val="75000"/>
@@ -1238,7 +1228,7 @@
           <a:p>
             <a:fld id="{773C130A-05B4-45F8-8AFF-FDFDEE2AD512}" type="datetimeFigureOut">
               <a:rPr lang="en-IN" smtClean="0"/>
-              <a:t>18-06-2026</a:t>
+              <a:t>23-06-2026</a:t>
             </a:fld>
             <a:endParaRPr lang="en-IN"/>
           </a:p>
@@ -1928,7 +1918,7 @@
           <a:p>
             <a:fld id="{35EFF7E2-E3E5-4E85-96A1-BA9CE6144F45}" type="datetimeFigureOut">
               <a:rPr lang="en-IN" smtClean="0"/>
-              <a:t>18-06-2026</a:t>
+              <a:t>23-06-2026</a:t>
             </a:fld>
             <a:endParaRPr lang="en-IN"/>
           </a:p>
@@ -2128,7 +2118,7 @@
           <a:p>
             <a:fld id="{35EFF7E2-E3E5-4E85-96A1-BA9CE6144F45}" type="datetimeFigureOut">
               <a:rPr lang="en-IN" smtClean="0"/>
-              <a:t>18-06-2026</a:t>
+              <a:t>23-06-2026</a:t>
             </a:fld>
             <a:endParaRPr lang="en-IN"/>
           </a:p>
@@ -2338,7 +2328,7 @@
           <a:p>
             <a:fld id="{35EFF7E2-E3E5-4E85-96A1-BA9CE6144F45}" type="datetimeFigureOut">
               <a:rPr lang="en-IN" smtClean="0"/>
-              <a:t>18-06-2026</a:t>
+              <a:t>23-06-2026</a:t>
             </a:fld>
             <a:endParaRPr lang="en-IN"/>
           </a:p>
@@ -2538,7 +2528,7 @@
           <a:p>
             <a:fld id="{35EFF7E2-E3E5-4E85-96A1-BA9CE6144F45}" type="datetimeFigureOut">
               <a:rPr lang="en-IN" smtClean="0"/>
-              <a:t>18-06-2026</a:t>
+              <a:t>23-06-2026</a:t>
             </a:fld>
             <a:endParaRPr lang="en-IN"/>
           </a:p>
@@ -2814,7 +2804,7 @@
           <a:p>
             <a:fld id="{35EFF7E2-E3E5-4E85-96A1-BA9CE6144F45}" type="datetimeFigureOut">
               <a:rPr lang="en-IN" smtClean="0"/>
-              <a:t>18-06-2026</a:t>
+              <a:t>23-06-2026</a:t>
             </a:fld>
             <a:endParaRPr lang="en-IN"/>
           </a:p>
@@ -3082,7 +3072,7 @@
           <a:p>
             <a:fld id="{35EFF7E2-E3E5-4E85-96A1-BA9CE6144F45}" type="datetimeFigureOut">
               <a:rPr lang="en-IN" smtClean="0"/>
-              <a:t>18-06-2026</a:t>
+              <a:t>23-06-2026</a:t>
             </a:fld>
             <a:endParaRPr lang="en-IN"/>
           </a:p>
@@ -3497,7 +3487,7 @@
           <a:p>
             <a:fld id="{35EFF7E2-E3E5-4E85-96A1-BA9CE6144F45}" type="datetimeFigureOut">
               <a:rPr lang="en-IN" smtClean="0"/>
-              <a:t>18-06-2026</a:t>
+              <a:t>23-06-2026</a:t>
             </a:fld>
             <a:endParaRPr lang="en-IN"/>
           </a:p>
@@ -3639,7 +3629,7 @@
           <a:p>
             <a:fld id="{35EFF7E2-E3E5-4E85-96A1-BA9CE6144F45}" type="datetimeFigureOut">
               <a:rPr lang="en-IN" smtClean="0"/>
-              <a:t>18-06-2026</a:t>
+              <a:t>23-06-2026</a:t>
             </a:fld>
             <a:endParaRPr lang="en-IN"/>
           </a:p>
@@ -3752,7 +3742,7 @@
           <a:p>
             <a:fld id="{35EFF7E2-E3E5-4E85-96A1-BA9CE6144F45}" type="datetimeFigureOut">
               <a:rPr lang="en-IN" smtClean="0"/>
-              <a:t>18-06-2026</a:t>
+              <a:t>23-06-2026</a:t>
             </a:fld>
             <a:endParaRPr lang="en-IN"/>
           </a:p>
@@ -4065,7 +4055,7 @@
           <a:p>
             <a:fld id="{35EFF7E2-E3E5-4E85-96A1-BA9CE6144F45}" type="datetimeFigureOut">
               <a:rPr lang="en-IN" smtClean="0"/>
-              <a:t>18-06-2026</a:t>
+              <a:t>23-06-2026</a:t>
             </a:fld>
             <a:endParaRPr lang="en-IN"/>
           </a:p>
@@ -4354,7 +4344,7 @@
           <a:p>
             <a:fld id="{35EFF7E2-E3E5-4E85-96A1-BA9CE6144F45}" type="datetimeFigureOut">
               <a:rPr lang="en-IN" smtClean="0"/>
-              <a:t>18-06-2026</a:t>
+              <a:t>23-06-2026</a:t>
             </a:fld>
             <a:endParaRPr lang="en-IN"/>
           </a:p>
@@ -4597,7 +4587,7 @@
           <a:p>
             <a:fld id="{35EFF7E2-E3E5-4E85-96A1-BA9CE6144F45}" type="datetimeFigureOut">
               <a:rPr lang="en-IN" smtClean="0"/>
-              <a:t>18-06-2026</a:t>
+              <a:t>23-06-2026</a:t>
             </a:fld>
             <a:endParaRPr lang="en-IN"/>
           </a:p>
@@ -5205,6 +5195,11 @@
           <a:bodyPr/>
           <a:lstStyle/>
           <a:p>
+            <a:pPr>
+              <a:lnSpc>
+                <a:spcPct val="150000"/>
+              </a:lnSpc>
+            </a:pPr>
             <a:r>
               <a:rPr lang="en-US" dirty="0">
                 <a:solidFill>
@@ -5217,6 +5212,11 @@
             </a:r>
           </a:p>
           <a:p>
+            <a:pPr>
+              <a:lnSpc>
+                <a:spcPct val="150000"/>
+              </a:lnSpc>
+            </a:pPr>
             <a:r>
               <a:rPr lang="en-US" dirty="0">
                 <a:solidFill>
@@ -5229,6 +5229,11 @@
             </a:r>
           </a:p>
           <a:p>
+            <a:pPr>
+              <a:lnSpc>
+                <a:spcPct val="150000"/>
+              </a:lnSpc>
+            </a:pPr>
             <a:r>
               <a:rPr lang="en-US" dirty="0">
                 <a:solidFill>
@@ -5333,7 +5338,7 @@
             <p:ph idx="1"/>
             <p:extLst>
               <p:ext uri="{D42A27DB-BD31-4B8C-83A1-F6EECF244321}">
-                <p14:modId xmlns:p14="http://schemas.microsoft.com/office/powerpoint/2010/main" val="2465515510"/>
+                <p14:modId xmlns:p14="http://schemas.microsoft.com/office/powerpoint/2010/main" val="1713513218"/>
               </p:ext>
             </p:extLst>
           </p:nvPr>
@@ -5489,8 +5494,25 @@
                   </a:schemeClr>
                 </a:solidFill>
               </a:rPr>
-              <a:t>Production Output: Preserved the optimized dataset into the /output folder for reporting and visualization.</a:t>
-            </a:r>
+              <a:t>Production Output: Preserved the optimized dataset as employee_salary_analysis_v1.xlsx inside the /</a:t>
+            </a:r>
+            <a:r>
+              <a:rPr lang="en-IN">
+                <a:solidFill>
+                  <a:schemeClr val="bg2">
+                    <a:lumMod val="10000"/>
+                  </a:schemeClr>
+                </a:solidFill>
+              </a:rPr>
+              <a:t>output directory.</a:t>
+            </a:r>
+            <a:endParaRPr lang="en-IN" dirty="0">
+              <a:solidFill>
+                <a:schemeClr val="bg2">
+                  <a:lumMod val="10000"/>
+                </a:schemeClr>
+              </a:solidFill>
+            </a:endParaRPr>
           </a:p>
         </p:txBody>
       </p:sp>

--- a/Employee_Salary_Analysis_Presentation.pptx
+++ b/Employee_Salary_Analysis_Presentation.pptx
@@ -122,8 +122,8 @@
 <pc:chgInfo xmlns:a="http://schemas.openxmlformats.org/drawingml/2006/main" xmlns:r="http://schemas.openxmlformats.org/officeDocument/2006/relationships" xmlns:ac="http://schemas.microsoft.com/office/drawing/2013/main/command" xmlns:pc="http://schemas.microsoft.com/office/powerpoint/2013/main/command">
   <pc:docChgLst>
     <pc:chgData name="Agnelo Lobo" userId="aa5a333d4923ff27" providerId="LiveId" clId="{0ABBD09F-FB54-45DB-9DCF-26A8D8445870}"/>
-    <pc:docChg chg="addSld delSld modSld">
-      <pc:chgData name="Agnelo Lobo" userId="aa5a333d4923ff27" providerId="LiveId" clId="{0ABBD09F-FB54-45DB-9DCF-26A8D8445870}" dt="2026-06-22T19:35:43.281" v="337" actId="20577"/>
+    <pc:docChg chg="undo custSel addSld delSld modSld">
+      <pc:chgData name="Agnelo Lobo" userId="aa5a333d4923ff27" providerId="LiveId" clId="{0ABBD09F-FB54-45DB-9DCF-26A8D8445870}" dt="2026-06-24T18:28:10.593" v="354" actId="20577"/>
       <pc:docMkLst>
         <pc:docMk/>
       </pc:docMkLst>
@@ -151,7 +151,7 @@
         </pc:spChg>
       </pc:sldChg>
       <pc:sldChg chg="addSp delSp modSp new mod">
-        <pc:chgData name="Agnelo Lobo" userId="aa5a333d4923ff27" providerId="LiveId" clId="{0ABBD09F-FB54-45DB-9DCF-26A8D8445870}" dt="2026-06-22T19:29:25.591" v="216" actId="113"/>
+        <pc:chgData name="Agnelo Lobo" userId="aa5a333d4923ff27" providerId="LiveId" clId="{0ABBD09F-FB54-45DB-9DCF-26A8D8445870}" dt="2026-06-24T18:28:10.593" v="354" actId="20577"/>
         <pc:sldMkLst>
           <pc:docMk/>
           <pc:sldMk cId="2659291324" sldId="258"/>
@@ -164,8 +164,16 @@
             <ac:spMk id="2" creationId="{7712FEA0-38C4-793E-6CF2-B7EC64F48C2B}"/>
           </ac:spMkLst>
         </pc:spChg>
-        <pc:graphicFrameChg chg="add mod">
-          <ac:chgData name="Agnelo Lobo" userId="aa5a333d4923ff27" providerId="LiveId" clId="{0ABBD09F-FB54-45DB-9DCF-26A8D8445870}" dt="2026-06-22T19:29:25.591" v="216" actId="113"/>
+        <pc:spChg chg="add mod">
+          <ac:chgData name="Agnelo Lobo" userId="aa5a333d4923ff27" providerId="LiveId" clId="{0ABBD09F-FB54-45DB-9DCF-26A8D8445870}" dt="2026-06-24T18:28:10.593" v="354" actId="20577"/>
+          <ac:spMkLst>
+            <pc:docMk/>
+            <pc:sldMk cId="2659291324" sldId="258"/>
+            <ac:spMk id="5" creationId="{AD3D6561-7B0E-A5BD-73E6-1523F7BEFA09}"/>
+          </ac:spMkLst>
+        </pc:spChg>
+        <pc:graphicFrameChg chg="add del mod">
+          <ac:chgData name="Agnelo Lobo" userId="aa5a333d4923ff27" providerId="LiveId" clId="{0ABBD09F-FB54-45DB-9DCF-26A8D8445870}" dt="2026-06-24T18:25:36.595" v="340" actId="478"/>
           <ac:graphicFrameMkLst>
             <pc:docMk/>
             <pc:sldMk cId="2659291324" sldId="258"/>
@@ -224,928 +232,6 @@
 </pc:chgInfo>
 </file>
 
-<file path=ppt/charts/chart1.xml><?xml version="1.0" encoding="utf-8"?>
-<c:chartSpace xmlns:c="http://schemas.openxmlformats.org/drawingml/2006/chart" xmlns:a="http://schemas.openxmlformats.org/drawingml/2006/main" xmlns:r="http://schemas.openxmlformats.org/officeDocument/2006/relationships" xmlns:c16r2="http://schemas.microsoft.com/office/drawing/2015/06/chart">
-  <c:date1904 val="0"/>
-  <c:lang val="en-US"/>
-  <c:roundedCorners val="0"/>
-  <mc:AlternateContent xmlns:mc="http://schemas.openxmlformats.org/markup-compatibility/2006">
-    <mc:Choice xmlns:c14="http://schemas.microsoft.com/office/drawing/2007/8/2/chart" Requires="c14">
-      <c14:style val="102"/>
-    </mc:Choice>
-    <mc:Fallback>
-      <c:style val="2"/>
-    </mc:Fallback>
-  </mc:AlternateContent>
-  <c:chart>
-    <c:title>
-      <c:tx>
-        <c:rich>
-          <a:bodyPr rot="0" spcFirstLastPara="1" vertOverflow="ellipsis" vert="horz" wrap="square" anchor="ctr" anchorCtr="1"/>
-          <a:lstStyle/>
-          <a:p>
-            <a:pPr>
-              <a:defRPr sz="1600" b="0" i="0" u="none" strike="noStrike" kern="1200" spc="0" baseline="0">
-                <a:solidFill>
-                  <a:schemeClr val="tx1">
-                    <a:lumMod val="65000"/>
-                    <a:lumOff val="35000"/>
-                  </a:schemeClr>
-                </a:solidFill>
-                <a:latin typeface="+mn-lt"/>
-                <a:ea typeface="+mn-ea"/>
-                <a:cs typeface="+mn-cs"/>
-              </a:defRPr>
-            </a:pPr>
-            <a:r>
-              <a:rPr lang="en-US" sz="1600"/>
-              <a:t>Engineering</a:t>
-            </a:r>
-            <a:r>
-              <a:rPr lang="en-US" sz="1600" baseline="0"/>
-              <a:t> Leads Company Averages</a:t>
-            </a:r>
-            <a:endParaRPr lang="en-US" sz="1600"/>
-          </a:p>
-        </c:rich>
-      </c:tx>
-      <c:overlay val="0"/>
-      <c:spPr>
-        <a:noFill/>
-        <a:ln>
-          <a:noFill/>
-        </a:ln>
-        <a:effectLst/>
-      </c:spPr>
-      <c:txPr>
-        <a:bodyPr rot="0" spcFirstLastPara="1" vertOverflow="ellipsis" vert="horz" wrap="square" anchor="ctr" anchorCtr="1"/>
-        <a:lstStyle/>
-        <a:p>
-          <a:pPr>
-            <a:defRPr sz="1600" b="0" i="0" u="none" strike="noStrike" kern="1200" spc="0" baseline="0">
-              <a:solidFill>
-                <a:schemeClr val="tx1">
-                  <a:lumMod val="65000"/>
-                  <a:lumOff val="35000"/>
-                </a:schemeClr>
-              </a:solidFill>
-              <a:latin typeface="+mn-lt"/>
-              <a:ea typeface="+mn-ea"/>
-              <a:cs typeface="+mn-cs"/>
-            </a:defRPr>
-          </a:pPr>
-          <a:endParaRPr lang="en-US"/>
-        </a:p>
-      </c:txPr>
-    </c:title>
-    <c:autoTitleDeleted val="0"/>
-    <c:plotArea>
-      <c:layout/>
-      <c:barChart>
-        <c:barDir val="col"/>
-        <c:grouping val="clustered"/>
-        <c:varyColors val="0"/>
-        <c:ser>
-          <c:idx val="0"/>
-          <c:order val="0"/>
-          <c:tx>
-            <c:strRef>
-              <c:f>employee_salaries_clean!$J$1</c:f>
-              <c:strCache>
-                <c:ptCount val="1"/>
-                <c:pt idx="0">
-                  <c:v>Average Salary</c:v>
-                </c:pt>
-              </c:strCache>
-            </c:strRef>
-          </c:tx>
-          <c:spPr>
-            <a:solidFill>
-              <a:schemeClr val="bg2">
-                <a:lumMod val="90000"/>
-              </a:schemeClr>
-            </a:solidFill>
-            <a:ln>
-              <a:noFill/>
-            </a:ln>
-            <a:effectLst/>
-          </c:spPr>
-          <c:invertIfNegative val="0"/>
-          <c:dPt>
-            <c:idx val="0"/>
-            <c:invertIfNegative val="0"/>
-            <c:bubble3D val="0"/>
-            <c:spPr>
-              <a:solidFill>
-                <a:schemeClr val="accent1"/>
-              </a:solidFill>
-              <a:ln>
-                <a:noFill/>
-              </a:ln>
-              <a:effectLst/>
-            </c:spPr>
-            <c:extLst>
-              <c:ext xmlns:c16="http://schemas.microsoft.com/office/drawing/2014/chart" uri="{C3380CC4-5D6E-409C-BE32-E72D297353CC}">
-                <c16:uniqueId val="{00000001-2577-42F7-BEFF-72C3B9AE5933}"/>
-              </c:ext>
-            </c:extLst>
-          </c:dPt>
-          <c:dLbls>
-            <c:numFmt formatCode="[&gt;=1000]\$#,&quot;K&quot;;\$#,##0" sourceLinked="0"/>
-            <c:spPr>
-              <a:noFill/>
-              <a:ln>
-                <a:noFill/>
-              </a:ln>
-              <a:effectLst/>
-            </c:spPr>
-            <c:txPr>
-              <a:bodyPr rot="0" spcFirstLastPara="1" vertOverflow="ellipsis" vert="horz" wrap="square" lIns="38100" tIns="19050" rIns="38100" bIns="19050" anchor="ctr" anchorCtr="1">
-                <a:spAutoFit/>
-              </a:bodyPr>
-              <a:lstStyle/>
-              <a:p>
-                <a:pPr>
-                  <a:defRPr sz="1600" b="1" i="0" u="none" strike="noStrike" kern="1200" baseline="0">
-                    <a:solidFill>
-                      <a:schemeClr val="tx1">
-                        <a:lumMod val="75000"/>
-                        <a:lumOff val="25000"/>
-                      </a:schemeClr>
-                    </a:solidFill>
-                    <a:latin typeface="+mn-lt"/>
-                    <a:ea typeface="+mn-ea"/>
-                    <a:cs typeface="+mn-cs"/>
-                  </a:defRPr>
-                </a:pPr>
-                <a:endParaRPr lang="en-US"/>
-              </a:p>
-            </c:txPr>
-            <c:showLegendKey val="0"/>
-            <c:showVal val="1"/>
-            <c:showCatName val="0"/>
-            <c:showSerName val="0"/>
-            <c:showPercent val="0"/>
-            <c:showBubbleSize val="0"/>
-            <c:showLeaderLines val="0"/>
-            <c:extLst>
-              <c:ext xmlns:c15="http://schemas.microsoft.com/office/drawing/2012/chart" uri="{CE6537A1-D6FC-4f65-9D91-7224C49458BB}">
-                <c15:showLeaderLines val="1"/>
-                <c15:leaderLines>
-                  <c:spPr>
-                    <a:ln w="9525" cap="flat" cmpd="sng" algn="ctr">
-                      <a:solidFill>
-                        <a:schemeClr val="tx1">
-                          <a:lumMod val="35000"/>
-                          <a:lumOff val="65000"/>
-                        </a:schemeClr>
-                      </a:solidFill>
-                      <a:round/>
-                    </a:ln>
-                    <a:effectLst/>
-                  </c:spPr>
-                </c15:leaderLines>
-              </c:ext>
-            </c:extLst>
-          </c:dLbls>
-          <c:cat>
-            <c:strRef>
-              <c:f>employee_salaries_clean!$I$2:$I$5</c:f>
-              <c:strCache>
-                <c:ptCount val="4"/>
-                <c:pt idx="0">
-                  <c:v>Engineering</c:v>
-                </c:pt>
-                <c:pt idx="1">
-                  <c:v>Sales</c:v>
-                </c:pt>
-                <c:pt idx="2">
-                  <c:v>HR</c:v>
-                </c:pt>
-                <c:pt idx="3">
-                  <c:v>Marketing</c:v>
-                </c:pt>
-              </c:strCache>
-            </c:strRef>
-          </c:cat>
-          <c:val>
-            <c:numRef>
-              <c:f>employee_salaries_clean!$J$2:$J$5</c:f>
-              <c:numCache>
-                <c:formatCode>General</c:formatCode>
-                <c:ptCount val="4"/>
-                <c:pt idx="0">
-                  <c:v>93250</c:v>
-                </c:pt>
-                <c:pt idx="1">
-                  <c:v>60000</c:v>
-                </c:pt>
-                <c:pt idx="2">
-                  <c:v>68000</c:v>
-                </c:pt>
-                <c:pt idx="3">
-                  <c:v>62500</c:v>
-                </c:pt>
-              </c:numCache>
-            </c:numRef>
-          </c:val>
-          <c:extLst>
-            <c:ext xmlns:c16="http://schemas.microsoft.com/office/drawing/2014/chart" uri="{C3380CC4-5D6E-409C-BE32-E72D297353CC}">
-              <c16:uniqueId val="{00000002-2577-42F7-BEFF-72C3B9AE5933}"/>
-            </c:ext>
-          </c:extLst>
-        </c:ser>
-        <c:dLbls>
-          <c:showLegendKey val="0"/>
-          <c:showVal val="0"/>
-          <c:showCatName val="0"/>
-          <c:showSerName val="0"/>
-          <c:showPercent val="0"/>
-          <c:showBubbleSize val="0"/>
-        </c:dLbls>
-        <c:gapWidth val="219"/>
-        <c:overlap val="-27"/>
-        <c:axId val="517099920"/>
-        <c:axId val="517090320"/>
-      </c:barChart>
-      <c:catAx>
-        <c:axId val="517099920"/>
-        <c:scaling>
-          <c:orientation val="minMax"/>
-        </c:scaling>
-        <c:delete val="0"/>
-        <c:axPos val="b"/>
-        <c:numFmt formatCode="General" sourceLinked="1"/>
-        <c:majorTickMark val="none"/>
-        <c:minorTickMark val="none"/>
-        <c:tickLblPos val="nextTo"/>
-        <c:spPr>
-          <a:noFill/>
-          <a:ln w="9525" cap="flat" cmpd="sng" algn="ctr">
-            <a:solidFill>
-              <a:schemeClr val="tx1">
-                <a:lumMod val="15000"/>
-                <a:lumOff val="85000"/>
-              </a:schemeClr>
-            </a:solidFill>
-            <a:round/>
-          </a:ln>
-          <a:effectLst/>
-        </c:spPr>
-        <c:txPr>
-          <a:bodyPr rot="-60000000" spcFirstLastPara="1" vertOverflow="ellipsis" vert="horz" wrap="square" anchor="ctr" anchorCtr="1"/>
-          <a:lstStyle/>
-          <a:p>
-            <a:pPr>
-              <a:defRPr sz="1600" b="0" i="0" u="none" strike="noStrike" kern="1200" baseline="0">
-                <a:solidFill>
-                  <a:schemeClr val="tx1">
-                    <a:lumMod val="65000"/>
-                    <a:lumOff val="35000"/>
-                  </a:schemeClr>
-                </a:solidFill>
-                <a:latin typeface="+mn-lt"/>
-                <a:ea typeface="+mn-ea"/>
-                <a:cs typeface="+mn-cs"/>
-              </a:defRPr>
-            </a:pPr>
-            <a:endParaRPr lang="en-US"/>
-          </a:p>
-        </c:txPr>
-        <c:crossAx val="517090320"/>
-        <c:crosses val="autoZero"/>
-        <c:auto val="1"/>
-        <c:lblAlgn val="ctr"/>
-        <c:lblOffset val="100"/>
-        <c:noMultiLvlLbl val="0"/>
-      </c:catAx>
-      <c:valAx>
-        <c:axId val="517090320"/>
-        <c:scaling>
-          <c:orientation val="minMax"/>
-        </c:scaling>
-        <c:delete val="0"/>
-        <c:axPos val="l"/>
-        <c:numFmt formatCode="[&gt;=1000000]\$#,,&quot;M&quot;;[&gt;=1000]\$#,&quot;K&quot;;\$#,##0" sourceLinked="0"/>
-        <c:majorTickMark val="none"/>
-        <c:minorTickMark val="none"/>
-        <c:tickLblPos val="nextTo"/>
-        <c:spPr>
-          <a:noFill/>
-          <a:ln>
-            <a:noFill/>
-          </a:ln>
-          <a:effectLst/>
-        </c:spPr>
-        <c:txPr>
-          <a:bodyPr rot="-60000000" spcFirstLastPara="1" vertOverflow="ellipsis" vert="horz" wrap="square" anchor="ctr" anchorCtr="1"/>
-          <a:lstStyle/>
-          <a:p>
-            <a:pPr>
-              <a:defRPr sz="1600" b="0" i="0" u="none" strike="noStrike" kern="1200" baseline="0">
-                <a:solidFill>
-                  <a:schemeClr val="tx1">
-                    <a:lumMod val="65000"/>
-                    <a:lumOff val="35000"/>
-                  </a:schemeClr>
-                </a:solidFill>
-                <a:latin typeface="+mn-lt"/>
-                <a:ea typeface="+mn-ea"/>
-                <a:cs typeface="+mn-cs"/>
-              </a:defRPr>
-            </a:pPr>
-            <a:endParaRPr lang="en-US"/>
-          </a:p>
-        </c:txPr>
-        <c:crossAx val="517099920"/>
-        <c:crosses val="autoZero"/>
-        <c:crossBetween val="between"/>
-      </c:valAx>
-      <c:spPr>
-        <a:noFill/>
-        <a:ln>
-          <a:noFill/>
-        </a:ln>
-        <a:effectLst/>
-      </c:spPr>
-    </c:plotArea>
-    <c:plotVisOnly val="1"/>
-    <c:dispBlanksAs val="gap"/>
-    <c:showDLblsOverMax val="0"/>
-    <c:extLst>
-      <c:ext xmlns:c16r3="http://schemas.microsoft.com/office/drawing/2017/03/chart" uri="{56B9EC1D-385E-4148-901F-78D8002777C0}">
-        <c16r3:dataDisplayOptions16>
-          <c16r3:dispNaAsBlank val="1"/>
-        </c16r3:dataDisplayOptions16>
-      </c:ext>
-    </c:extLst>
-  </c:chart>
-  <c:spPr>
-    <a:noFill/>
-    <a:ln>
-      <a:noFill/>
-    </a:ln>
-    <a:effectLst/>
-  </c:spPr>
-  <c:txPr>
-    <a:bodyPr/>
-    <a:lstStyle/>
-    <a:p>
-      <a:pPr>
-        <a:defRPr/>
-      </a:pPr>
-      <a:endParaRPr lang="en-US"/>
-    </a:p>
-  </c:txPr>
-  <c:externalData r:id="rId3">
-    <c:autoUpdate val="0"/>
-  </c:externalData>
-</c:chartSpace>
-</file>
-
-<file path=ppt/charts/colors1.xml><?xml version="1.0" encoding="utf-8"?>
-<cs:colorStyle xmlns:cs="http://schemas.microsoft.com/office/drawing/2012/chartStyle" xmlns:a="http://schemas.openxmlformats.org/drawingml/2006/main" meth="cycle" id="10">
-  <a:schemeClr val="accent1"/>
-  <a:schemeClr val="accent2"/>
-  <a:schemeClr val="accent3"/>
-  <a:schemeClr val="accent4"/>
-  <a:schemeClr val="accent5"/>
-  <a:schemeClr val="accent6"/>
-  <cs:variation/>
-  <cs:variation>
-    <a:lumMod val="60000"/>
-  </cs:variation>
-  <cs:variation>
-    <a:lumMod val="80000"/>
-    <a:lumOff val="20000"/>
-  </cs:variation>
-  <cs:variation>
-    <a:lumMod val="80000"/>
-  </cs:variation>
-  <cs:variation>
-    <a:lumMod val="60000"/>
-    <a:lumOff val="40000"/>
-  </cs:variation>
-  <cs:variation>
-    <a:lumMod val="50000"/>
-  </cs:variation>
-  <cs:variation>
-    <a:lumMod val="70000"/>
-    <a:lumOff val="30000"/>
-  </cs:variation>
-  <cs:variation>
-    <a:lumMod val="70000"/>
-  </cs:variation>
-  <cs:variation>
-    <a:lumMod val="50000"/>
-    <a:lumOff val="50000"/>
-  </cs:variation>
-</cs:colorStyle>
-</file>
-
-<file path=ppt/charts/style1.xml><?xml version="1.0" encoding="utf-8"?>
-<cs:chartStyle xmlns:cs="http://schemas.microsoft.com/office/drawing/2012/chartStyle" xmlns:a="http://schemas.openxmlformats.org/drawingml/2006/main" id="201">
-  <cs:axisTitle>
-    <cs:lnRef idx="0"/>
-    <cs:fillRef idx="0"/>
-    <cs:effectRef idx="0"/>
-    <cs:fontRef idx="minor">
-      <a:schemeClr val="tx1">
-        <a:lumMod val="65000"/>
-        <a:lumOff val="35000"/>
-      </a:schemeClr>
-    </cs:fontRef>
-    <cs:defRPr sz="1000" kern="1200"/>
-  </cs:axisTitle>
-  <cs:categoryAxis>
-    <cs:lnRef idx="0"/>
-    <cs:fillRef idx="0"/>
-    <cs:effectRef idx="0"/>
-    <cs:fontRef idx="minor">
-      <a:schemeClr val="tx1">
-        <a:lumMod val="65000"/>
-        <a:lumOff val="35000"/>
-      </a:schemeClr>
-    </cs:fontRef>
-    <cs:spPr>
-      <a:ln w="9525" cap="flat" cmpd="sng" algn="ctr">
-        <a:solidFill>
-          <a:schemeClr val="tx1">
-            <a:lumMod val="15000"/>
-            <a:lumOff val="85000"/>
-          </a:schemeClr>
-        </a:solidFill>
-        <a:round/>
-      </a:ln>
-    </cs:spPr>
-    <cs:defRPr sz="900" kern="1200"/>
-  </cs:categoryAxis>
-  <cs:chartArea mods="allowNoFillOverride allowNoLineOverride">
-    <cs:lnRef idx="0"/>
-    <cs:fillRef idx="0"/>
-    <cs:effectRef idx="0"/>
-    <cs:fontRef idx="minor">
-      <a:schemeClr val="tx1"/>
-    </cs:fontRef>
-    <cs:spPr>
-      <a:solidFill>
-        <a:schemeClr val="bg1"/>
-      </a:solidFill>
-      <a:ln w="9525" cap="flat" cmpd="sng" algn="ctr">
-        <a:solidFill>
-          <a:schemeClr val="tx1">
-            <a:lumMod val="15000"/>
-            <a:lumOff val="85000"/>
-          </a:schemeClr>
-        </a:solidFill>
-        <a:round/>
-      </a:ln>
-    </cs:spPr>
-    <cs:defRPr sz="1000" kern="1200"/>
-  </cs:chartArea>
-  <cs:dataLabel>
-    <cs:lnRef idx="0"/>
-    <cs:fillRef idx="0"/>
-    <cs:effectRef idx="0"/>
-    <cs:fontRef idx="minor">
-      <a:schemeClr val="tx1">
-        <a:lumMod val="75000"/>
-        <a:lumOff val="25000"/>
-      </a:schemeClr>
-    </cs:fontRef>
-    <cs:defRPr sz="900" kern="1200"/>
-  </cs:dataLabel>
-  <cs:dataLabelCallout>
-    <cs:lnRef idx="0"/>
-    <cs:fillRef idx="0"/>
-    <cs:effectRef idx="0"/>
-    <cs:fontRef idx="minor">
-      <a:schemeClr val="dk1">
-        <a:lumMod val="65000"/>
-        <a:lumOff val="35000"/>
-      </a:schemeClr>
-    </cs:fontRef>
-    <cs:spPr>
-      <a:solidFill>
-        <a:schemeClr val="lt1"/>
-      </a:solidFill>
-      <a:ln>
-        <a:solidFill>
-          <a:schemeClr val="dk1">
-            <a:lumMod val="25000"/>
-            <a:lumOff val="75000"/>
-          </a:schemeClr>
-        </a:solidFill>
-      </a:ln>
-    </cs:spPr>
-    <cs:defRPr sz="900" kern="1200"/>
-    <cs:bodyPr rot="0" spcFirstLastPara="1" vertOverflow="clip" horzOverflow="clip" vert="horz" wrap="square" lIns="36576" tIns="18288" rIns="36576" bIns="18288" anchor="ctr" anchorCtr="1">
-      <a:spAutoFit/>
-    </cs:bodyPr>
-  </cs:dataLabelCallout>
-  <cs:dataPoint>
-    <cs:lnRef idx="0"/>
-    <cs:fillRef idx="1">
-      <cs:styleClr val="auto"/>
-    </cs:fillRef>
-    <cs:effectRef idx="0"/>
-    <cs:fontRef idx="minor">
-      <a:schemeClr val="tx1"/>
-    </cs:fontRef>
-  </cs:dataPoint>
-  <cs:dataPoint3D>
-    <cs:lnRef idx="0"/>
-    <cs:fillRef idx="1">
-      <cs:styleClr val="auto"/>
-    </cs:fillRef>
-    <cs:effectRef idx="0"/>
-    <cs:fontRef idx="minor">
-      <a:schemeClr val="tx1"/>
-    </cs:fontRef>
-  </cs:dataPoint3D>
-  <cs:dataPointLine>
-    <cs:lnRef idx="0">
-      <cs:styleClr val="auto"/>
-    </cs:lnRef>
-    <cs:fillRef idx="1"/>
-    <cs:effectRef idx="0"/>
-    <cs:fontRef idx="minor">
-      <a:schemeClr val="tx1"/>
-    </cs:fontRef>
-    <cs:spPr>
-      <a:ln w="28575" cap="rnd">
-        <a:solidFill>
-          <a:schemeClr val="phClr"/>
-        </a:solidFill>
-        <a:round/>
-      </a:ln>
-    </cs:spPr>
-  </cs:dataPointLine>
-  <cs:dataPointMarker>
-    <cs:lnRef idx="0">
-      <cs:styleClr val="auto"/>
-    </cs:lnRef>
-    <cs:fillRef idx="1">
-      <cs:styleClr val="auto"/>
-    </cs:fillRef>
-    <cs:effectRef idx="0"/>
-    <cs:fontRef idx="minor">
-      <a:schemeClr val="tx1"/>
-    </cs:fontRef>
-    <cs:spPr>
-      <a:ln w="9525">
-        <a:solidFill>
-          <a:schemeClr val="phClr"/>
-        </a:solidFill>
-      </a:ln>
-    </cs:spPr>
-  </cs:dataPointMarker>
-  <cs:dataPointMarkerLayout symbol="circle" size="5"/>
-  <cs:dataPointWireframe>
-    <cs:lnRef idx="0">
-      <cs:styleClr val="auto"/>
-    </cs:lnRef>
-    <cs:fillRef idx="1"/>
-    <cs:effectRef idx="0"/>
-    <cs:fontRef idx="minor">
-      <a:schemeClr val="tx1"/>
-    </cs:fontRef>
-    <cs:spPr>
-      <a:ln w="9525" cap="rnd">
-        <a:solidFill>
-          <a:schemeClr val="phClr"/>
-        </a:solidFill>
-        <a:round/>
-      </a:ln>
-    </cs:spPr>
-  </cs:dataPointWireframe>
-  <cs:dataTable>
-    <cs:lnRef idx="0"/>
-    <cs:fillRef idx="0"/>
-    <cs:effectRef idx="0"/>
-    <cs:fontRef idx="minor">
-      <a:schemeClr val="tx1">
-        <a:lumMod val="65000"/>
-        <a:lumOff val="35000"/>
-      </a:schemeClr>
-    </cs:fontRef>
-    <cs:spPr>
-      <a:noFill/>
-      <a:ln w="9525" cap="flat" cmpd="sng" algn="ctr">
-        <a:solidFill>
-          <a:schemeClr val="tx1">
-            <a:lumMod val="15000"/>
-            <a:lumOff val="85000"/>
-          </a:schemeClr>
-        </a:solidFill>
-        <a:round/>
-      </a:ln>
-    </cs:spPr>
-    <cs:defRPr sz="900" kern="1200"/>
-  </cs:dataTable>
-  <cs:downBar>
-    <cs:lnRef idx="0"/>
-    <cs:fillRef idx="0"/>
-    <cs:effectRef idx="0"/>
-    <cs:fontRef idx="minor">
-      <a:schemeClr val="dk1"/>
-    </cs:fontRef>
-    <cs:spPr>
-      <a:solidFill>
-        <a:schemeClr val="dk1">
-          <a:lumMod val="65000"/>
-          <a:lumOff val="35000"/>
-        </a:schemeClr>
-      </a:solidFill>
-      <a:ln w="9525">
-        <a:solidFill>
-          <a:schemeClr val="tx1">
-            <a:lumMod val="65000"/>
-            <a:lumOff val="35000"/>
-          </a:schemeClr>
-        </a:solidFill>
-      </a:ln>
-    </cs:spPr>
-  </cs:downBar>
-  <cs:dropLine>
-    <cs:lnRef idx="0"/>
-    <cs:fillRef idx="0"/>
-    <cs:effectRef idx="0"/>
-    <cs:fontRef idx="minor">
-      <a:schemeClr val="tx1"/>
-    </cs:fontRef>
-    <cs:spPr>
-      <a:ln w="9525" cap="flat" cmpd="sng" algn="ctr">
-        <a:solidFill>
-          <a:schemeClr val="tx1">
-            <a:lumMod val="35000"/>
-            <a:lumOff val="65000"/>
-          </a:schemeClr>
-        </a:solidFill>
-        <a:round/>
-      </a:ln>
-    </cs:spPr>
-  </cs:dropLine>
-  <cs:errorBar>
-    <cs:lnRef idx="0"/>
-    <cs:fillRef idx="0"/>
-    <cs:effectRef idx="0"/>
-    <cs:fontRef idx="minor">
-      <a:schemeClr val="tx1"/>
-    </cs:fontRef>
-    <cs:spPr>
-      <a:ln w="9525" cap="flat" cmpd="sng" algn="ctr">
-        <a:solidFill>
-          <a:schemeClr val="tx1">
-            <a:lumMod val="65000"/>
-            <a:lumOff val="35000"/>
-          </a:schemeClr>
-        </a:solidFill>
-        <a:round/>
-      </a:ln>
-    </cs:spPr>
-  </cs:errorBar>
-  <cs:floor>
-    <cs:lnRef idx="0"/>
-    <cs:fillRef idx="0"/>
-    <cs:effectRef idx="0"/>
-    <cs:fontRef idx="minor">
-      <a:schemeClr val="tx1"/>
-    </cs:fontRef>
-    <cs:spPr>
-      <a:noFill/>
-      <a:ln>
-        <a:noFill/>
-      </a:ln>
-    </cs:spPr>
-  </cs:floor>
-  <cs:gridlineMajor>
-    <cs:lnRef idx="0"/>
-    <cs:fillRef idx="0"/>
-    <cs:effectRef idx="0"/>
-    <cs:fontRef idx="minor">
-      <a:schemeClr val="tx1"/>
-    </cs:fontRef>
-    <cs:spPr>
-      <a:ln w="9525" cap="flat" cmpd="sng" algn="ctr">
-        <a:solidFill>
-          <a:schemeClr val="tx1">
-            <a:lumMod val="15000"/>
-            <a:lumOff val="85000"/>
-          </a:schemeClr>
-        </a:solidFill>
-        <a:round/>
-      </a:ln>
-    </cs:spPr>
-  </cs:gridlineMajor>
-  <cs:gridlineMinor>
-    <cs:lnRef idx="0"/>
-    <cs:fillRef idx="0"/>
-    <cs:effectRef idx="0"/>
-    <cs:fontRef idx="minor">
-      <a:schemeClr val="tx1"/>
-    </cs:fontRef>
-    <cs:spPr>
-      <a:ln w="9525" cap="flat" cmpd="sng" algn="ctr">
-        <a:solidFill>
-          <a:schemeClr val="tx1">
-            <a:lumMod val="5000"/>
-            <a:lumOff val="95000"/>
-          </a:schemeClr>
-        </a:solidFill>
-        <a:round/>
-      </a:ln>
-    </cs:spPr>
-  </cs:gridlineMinor>
-  <cs:hiLoLine>
-    <cs:lnRef idx="0"/>
-    <cs:fillRef idx="0"/>
-    <cs:effectRef idx="0"/>
-    <cs:fontRef idx="minor">
-      <a:schemeClr val="tx1"/>
-    </cs:fontRef>
-    <cs:spPr>
-      <a:ln w="9525" cap="flat" cmpd="sng" algn="ctr">
-        <a:solidFill>
-          <a:schemeClr val="tx1">
-            <a:lumMod val="75000"/>
-            <a:lumOff val="25000"/>
-          </a:schemeClr>
-        </a:solidFill>
-        <a:round/>
-      </a:ln>
-    </cs:spPr>
-  </cs:hiLoLine>
-  <cs:leaderLine>
-    <cs:lnRef idx="0"/>
-    <cs:fillRef idx="0"/>
-    <cs:effectRef idx="0"/>
-    <cs:fontRef idx="minor">
-      <a:schemeClr val="tx1"/>
-    </cs:fontRef>
-    <cs:spPr>
-      <a:ln w="9525" cap="flat" cmpd="sng" algn="ctr">
-        <a:solidFill>
-          <a:schemeClr val="tx1">
-            <a:lumMod val="35000"/>
-            <a:lumOff val="65000"/>
-          </a:schemeClr>
-        </a:solidFill>
-        <a:round/>
-      </a:ln>
-    </cs:spPr>
-  </cs:leaderLine>
-  <cs:legend>
-    <cs:lnRef idx="0"/>
-    <cs:fillRef idx="0"/>
-    <cs:effectRef idx="0"/>
-    <cs:fontRef idx="minor">
-      <a:schemeClr val="tx1">
-        <a:lumMod val="65000"/>
-        <a:lumOff val="35000"/>
-      </a:schemeClr>
-    </cs:fontRef>
-    <cs:defRPr sz="900" kern="1200"/>
-  </cs:legend>
-  <cs:plotArea mods="allowNoFillOverride allowNoLineOverride">
-    <cs:lnRef idx="0"/>
-    <cs:fillRef idx="0"/>
-    <cs:effectRef idx="0"/>
-    <cs:fontRef idx="minor">
-      <a:schemeClr val="tx1"/>
-    </cs:fontRef>
-  </cs:plotArea>
-  <cs:plotArea3D mods="allowNoFillOverride allowNoLineOverride">
-    <cs:lnRef idx="0"/>
-    <cs:fillRef idx="0"/>
-    <cs:effectRef idx="0"/>
-    <cs:fontRef idx="minor">
-      <a:schemeClr val="tx1"/>
-    </cs:fontRef>
-  </cs:plotArea3D>
-  <cs:seriesAxis>
-    <cs:lnRef idx="0"/>
-    <cs:fillRef idx="0"/>
-    <cs:effectRef idx="0"/>
-    <cs:fontRef idx="minor">
-      <a:schemeClr val="tx1">
-        <a:lumMod val="65000"/>
-        <a:lumOff val="35000"/>
-      </a:schemeClr>
-    </cs:fontRef>
-    <cs:defRPr sz="900" kern="1200"/>
-  </cs:seriesAxis>
-  <cs:seriesLine>
-    <cs:lnRef idx="0"/>
-    <cs:fillRef idx="0"/>
-    <cs:effectRef idx="0"/>
-    <cs:fontRef idx="minor">
-      <a:schemeClr val="tx1"/>
-    </cs:fontRef>
-    <cs:spPr>
-      <a:ln w="9525" cap="flat" cmpd="sng" algn="ctr">
-        <a:solidFill>
-          <a:schemeClr val="tx1">
-            <a:lumMod val="35000"/>
-            <a:lumOff val="65000"/>
-          </a:schemeClr>
-        </a:solidFill>
-        <a:round/>
-      </a:ln>
-    </cs:spPr>
-  </cs:seriesLine>
-  <cs:title>
-    <cs:lnRef idx="0"/>
-    <cs:fillRef idx="0"/>
-    <cs:effectRef idx="0"/>
-    <cs:fontRef idx="minor">
-      <a:schemeClr val="tx1">
-        <a:lumMod val="65000"/>
-        <a:lumOff val="35000"/>
-      </a:schemeClr>
-    </cs:fontRef>
-    <cs:defRPr sz="1400" b="0" kern="1200" spc="0" baseline="0"/>
-  </cs:title>
-  <cs:trendline>
-    <cs:lnRef idx="0">
-      <cs:styleClr val="auto"/>
-    </cs:lnRef>
-    <cs:fillRef idx="0"/>
-    <cs:effectRef idx="0"/>
-    <cs:fontRef idx="minor">
-      <a:schemeClr val="tx1"/>
-    </cs:fontRef>
-    <cs:spPr>
-      <a:ln w="19050" cap="rnd">
-        <a:solidFill>
-          <a:schemeClr val="phClr"/>
-        </a:solidFill>
-        <a:prstDash val="sysDot"/>
-      </a:ln>
-    </cs:spPr>
-  </cs:trendline>
-  <cs:trendlineLabel>
-    <cs:lnRef idx="0"/>
-    <cs:fillRef idx="0"/>
-    <cs:effectRef idx="0"/>
-    <cs:fontRef idx="minor">
-      <a:schemeClr val="tx1">
-        <a:lumMod val="65000"/>
-        <a:lumOff val="35000"/>
-      </a:schemeClr>
-    </cs:fontRef>
-    <cs:defRPr sz="900" kern="1200"/>
-  </cs:trendlineLabel>
-  <cs:upBar>
-    <cs:lnRef idx="0"/>
-    <cs:fillRef idx="0"/>
-    <cs:effectRef idx="0"/>
-    <cs:fontRef idx="minor">
-      <a:schemeClr val="dk1"/>
-    </cs:fontRef>
-    <cs:spPr>
-      <a:solidFill>
-        <a:schemeClr val="lt1"/>
-      </a:solidFill>
-      <a:ln w="9525">
-        <a:solidFill>
-          <a:schemeClr val="tx1">
-            <a:lumMod val="15000"/>
-            <a:lumOff val="85000"/>
-          </a:schemeClr>
-        </a:solidFill>
-      </a:ln>
-    </cs:spPr>
-  </cs:upBar>
-  <cs:valueAxis>
-    <cs:lnRef idx="0"/>
-    <cs:fillRef idx="0"/>
-    <cs:effectRef idx="0"/>
-    <cs:fontRef idx="minor">
-      <a:schemeClr val="tx1">
-        <a:lumMod val="65000"/>
-        <a:lumOff val="35000"/>
-      </a:schemeClr>
-    </cs:fontRef>
-    <cs:defRPr sz="900" kern="1200"/>
-  </cs:valueAxis>
-  <cs:wall>
-    <cs:lnRef idx="0"/>
-    <cs:fillRef idx="0"/>
-    <cs:effectRef idx="0"/>
-    <cs:fontRef idx="minor">
-      <a:schemeClr val="tx1"/>
-    </cs:fontRef>
-    <cs:spPr>
-      <a:noFill/>
-      <a:ln>
-        <a:noFill/>
-      </a:ln>
-    </cs:spPr>
-  </cs:wall>
-</cs:chartStyle>
-</file>
-
 <file path=ppt/notesMasters/notesMaster1.xml><?xml version="1.0" encoding="utf-8"?>
 <p:notesMaster xmlns:a="http://schemas.openxmlformats.org/drawingml/2006/main" xmlns:r="http://schemas.openxmlformats.org/officeDocument/2006/relationships" xmlns:p="http://schemas.openxmlformats.org/presentationml/2006/main">
   <p:cSld>
@@ -1228,7 +314,7 @@
           <a:p>
             <a:fld id="{773C130A-05B4-45F8-8AFF-FDFDEE2AD512}" type="datetimeFigureOut">
               <a:rPr lang="en-IN" smtClean="0"/>
-              <a:t>23-06-2026</a:t>
+              <a:t>24-06-2026</a:t>
             </a:fld>
             <a:endParaRPr lang="en-IN"/>
           </a:p>
@@ -1918,7 +1004,7 @@
           <a:p>
             <a:fld id="{35EFF7E2-E3E5-4E85-96A1-BA9CE6144F45}" type="datetimeFigureOut">
               <a:rPr lang="en-IN" smtClean="0"/>
-              <a:t>23-06-2026</a:t>
+              <a:t>24-06-2026</a:t>
             </a:fld>
             <a:endParaRPr lang="en-IN"/>
           </a:p>
@@ -2118,7 +1204,7 @@
           <a:p>
             <a:fld id="{35EFF7E2-E3E5-4E85-96A1-BA9CE6144F45}" type="datetimeFigureOut">
               <a:rPr lang="en-IN" smtClean="0"/>
-              <a:t>23-06-2026</a:t>
+              <a:t>24-06-2026</a:t>
             </a:fld>
             <a:endParaRPr lang="en-IN"/>
           </a:p>
@@ -2328,7 +1414,7 @@
           <a:p>
             <a:fld id="{35EFF7E2-E3E5-4E85-96A1-BA9CE6144F45}" type="datetimeFigureOut">
               <a:rPr lang="en-IN" smtClean="0"/>
-              <a:t>23-06-2026</a:t>
+              <a:t>24-06-2026</a:t>
             </a:fld>
             <a:endParaRPr lang="en-IN"/>
           </a:p>
@@ -2528,7 +1614,7 @@
           <a:p>
             <a:fld id="{35EFF7E2-E3E5-4E85-96A1-BA9CE6144F45}" type="datetimeFigureOut">
               <a:rPr lang="en-IN" smtClean="0"/>
-              <a:t>23-06-2026</a:t>
+              <a:t>24-06-2026</a:t>
             </a:fld>
             <a:endParaRPr lang="en-IN"/>
           </a:p>
@@ -2804,7 +1890,7 @@
           <a:p>
             <a:fld id="{35EFF7E2-E3E5-4E85-96A1-BA9CE6144F45}" type="datetimeFigureOut">
               <a:rPr lang="en-IN" smtClean="0"/>
-              <a:t>23-06-2026</a:t>
+              <a:t>24-06-2026</a:t>
             </a:fld>
             <a:endParaRPr lang="en-IN"/>
           </a:p>
@@ -3072,7 +2158,7 @@
           <a:p>
             <a:fld id="{35EFF7E2-E3E5-4E85-96A1-BA9CE6144F45}" type="datetimeFigureOut">
               <a:rPr lang="en-IN" smtClean="0"/>
-              <a:t>23-06-2026</a:t>
+              <a:t>24-06-2026</a:t>
             </a:fld>
             <a:endParaRPr lang="en-IN"/>
           </a:p>
@@ -3487,7 +2573,7 @@
           <a:p>
             <a:fld id="{35EFF7E2-E3E5-4E85-96A1-BA9CE6144F45}" type="datetimeFigureOut">
               <a:rPr lang="en-IN" smtClean="0"/>
-              <a:t>23-06-2026</a:t>
+              <a:t>24-06-2026</a:t>
             </a:fld>
             <a:endParaRPr lang="en-IN"/>
           </a:p>
@@ -3629,7 +2715,7 @@
           <a:p>
             <a:fld id="{35EFF7E2-E3E5-4E85-96A1-BA9CE6144F45}" type="datetimeFigureOut">
               <a:rPr lang="en-IN" smtClean="0"/>
-              <a:t>23-06-2026</a:t>
+              <a:t>24-06-2026</a:t>
             </a:fld>
             <a:endParaRPr lang="en-IN"/>
           </a:p>
@@ -3742,7 +2828,7 @@
           <a:p>
             <a:fld id="{35EFF7E2-E3E5-4E85-96A1-BA9CE6144F45}" type="datetimeFigureOut">
               <a:rPr lang="en-IN" smtClean="0"/>
-              <a:t>23-06-2026</a:t>
+              <a:t>24-06-2026</a:t>
             </a:fld>
             <a:endParaRPr lang="en-IN"/>
           </a:p>
@@ -4055,7 +3141,7 @@
           <a:p>
             <a:fld id="{35EFF7E2-E3E5-4E85-96A1-BA9CE6144F45}" type="datetimeFigureOut">
               <a:rPr lang="en-IN" smtClean="0"/>
-              <a:t>23-06-2026</a:t>
+              <a:t>24-06-2026</a:t>
             </a:fld>
             <a:endParaRPr lang="en-IN"/>
           </a:p>
@@ -4344,7 +3430,7 @@
           <a:p>
             <a:fld id="{35EFF7E2-E3E5-4E85-96A1-BA9CE6144F45}" type="datetimeFigureOut">
               <a:rPr lang="en-IN" smtClean="0"/>
-              <a:t>23-06-2026</a:t>
+              <a:t>24-06-2026</a:t>
             </a:fld>
             <a:endParaRPr lang="en-IN"/>
           </a:p>
@@ -4587,7 +3673,7 @@
           <a:p>
             <a:fld id="{35EFF7E2-E3E5-4E85-96A1-BA9CE6144F45}" type="datetimeFigureOut">
               <a:rPr lang="en-IN" smtClean="0"/>
-              <a:t>23-06-2026</a:t>
+              <a:t>24-06-2026</a:t>
             </a:fld>
             <a:endParaRPr lang="en-IN"/>
           </a:p>
@@ -5322,37 +4408,72 @@
           </a:p>
         </p:txBody>
       </p:sp>
-      <p:graphicFrame>
-        <p:nvGraphicFramePr>
-          <p:cNvPr id="4" name="Content Placeholder 3">
-            <a:extLst>
-              <a:ext uri="{FF2B5EF4-FFF2-40B4-BE49-F238E27FC236}">
-                <a16:creationId xmlns:a16="http://schemas.microsoft.com/office/drawing/2014/main" id="{E3D4F6F5-9F4A-519A-C872-5DFC20C188EA}"/>
-              </a:ext>
-            </a:extLst>
-          </p:cNvPr>
-          <p:cNvGraphicFramePr>
-            <a:graphicFrameLocks noGrp="1"/>
-          </p:cNvGraphicFramePr>
+      <p:sp>
+        <p:nvSpPr>
+          <p:cNvPr id="5" name="Content Placeholder 4">
+            <a:extLst>
+              <a:ext uri="{FF2B5EF4-FFF2-40B4-BE49-F238E27FC236}">
+                <a16:creationId xmlns:a16="http://schemas.microsoft.com/office/drawing/2014/main" id="{AD3D6561-7B0E-A5BD-73E6-1523F7BEFA09}"/>
+              </a:ext>
+            </a:extLst>
+          </p:cNvPr>
+          <p:cNvSpPr>
+            <a:spLocks noGrp="1"/>
+          </p:cNvSpPr>
           <p:nvPr>
             <p:ph idx="1"/>
-            <p:extLst>
-              <p:ext uri="{D42A27DB-BD31-4B8C-83A1-F6EECF244321}">
-                <p14:modId xmlns:p14="http://schemas.microsoft.com/office/powerpoint/2010/main" val="1713513218"/>
-              </p:ext>
-            </p:extLst>
-          </p:nvPr>
-        </p:nvGraphicFramePr>
-        <p:xfrm>
-          <a:off x="0" y="1473200"/>
-          <a:ext cx="12192000" cy="5384800"/>
-        </p:xfrm>
-        <a:graphic>
-          <a:graphicData uri="http://schemas.openxmlformats.org/drawingml/2006/chart">
-            <c:chart xmlns:c="http://schemas.openxmlformats.org/drawingml/2006/chart" xmlns:r="http://schemas.openxmlformats.org/officeDocument/2006/relationships" r:id="rId3"/>
-          </a:graphicData>
-        </a:graphic>
-      </p:graphicFrame>
+          </p:nvPr>
+        </p:nvSpPr>
+        <p:spPr/>
+        <p:txBody>
+          <a:bodyPr/>
+          <a:lstStyle/>
+          <a:p>
+            <a:r>
+              <a:rPr lang="en-IN" dirty="0"/>
+              <a:t>Engineering: $96K Average (Highest)</a:t>
+            </a:r>
+          </a:p>
+          <a:p>
+            <a:r>
+              <a:rPr lang="en-IN" dirty="0"/>
+              <a:t>Finance: $91K (1 Employee)</a:t>
+            </a:r>
+          </a:p>
+          <a:p>
+            <a:r>
+              <a:rPr lang="en-IN" dirty="0"/>
+              <a:t>HR: $68K Average</a:t>
+            </a:r>
+          </a:p>
+          <a:p>
+            <a:r>
+              <a:rPr lang="en-IN" dirty="0"/>
+              <a:t>Marketing: $63K Average</a:t>
+            </a:r>
+          </a:p>
+          <a:p>
+            <a:r>
+              <a:rPr lang="en-IN" dirty="0"/>
+              <a:t>Sales: $</a:t>
+            </a:r>
+            <a:r>
+              <a:rPr lang="en-IN"/>
+              <a:t>60K Average</a:t>
+            </a:r>
+          </a:p>
+          <a:p>
+            <a:r>
+              <a:rPr lang="en-IN"/>
+              <a:t>Unknown</a:t>
+            </a:r>
+            <a:r>
+              <a:rPr lang="en-IN" dirty="0"/>
+              <a:t>: $70K (1 Employee)</a:t>
+            </a:r>
+          </a:p>
+        </p:txBody>
+      </p:sp>
     </p:spTree>
     <p:extLst>
       <p:ext uri="{BB962C8B-B14F-4D97-AF65-F5344CB8AC3E}">
